--- a/media/exports/reports/2026-09/growth-services.pptx
+++ b/media/exports/reports/2026-09/growth-services.pptx
@@ -246,76 +246,76 @@
                 <c:formatCode>$#,##0;[Red]($#,##0);"-"</c:formatCode>
                 <c:ptCount val="24"/>
                 <c:pt idx="0">
-                  <c:v>94520</c:v>
+                  <c:v>103550</c:v>
                 </c:pt>
                 <c:pt idx="1">
-                  <c:v>108140</c:v>
+                  <c:v>118390</c:v>
                 </c:pt>
                 <c:pt idx="2">
-                  <c:v>114895</c:v>
+                  <c:v>125715</c:v>
                 </c:pt>
                 <c:pt idx="3">
-                  <c:v>88250</c:v>
+                  <c:v>96560</c:v>
                 </c:pt>
                 <c:pt idx="4">
-                  <c:v>111010</c:v>
+                  <c:v>121275</c:v>
                 </c:pt>
                 <c:pt idx="5">
-                  <c:v>77175</c:v>
+                  <c:v>84340</c:v>
                 </c:pt>
                 <c:pt idx="6">
-                  <c:v>63970</c:v>
+                  <c:v>69985</c:v>
                 </c:pt>
                 <c:pt idx="7">
-                  <c:v>95555</c:v>
+                  <c:v>104970</c:v>
                 </c:pt>
                 <c:pt idx="8">
-                  <c:v>90220</c:v>
+                  <c:v>99060</c:v>
                 </c:pt>
                 <c:pt idx="9">
-                  <c:v>86320</c:v>
+                  <c:v>94805</c:v>
                 </c:pt>
                 <c:pt idx="10">
-                  <c:v>61475</c:v>
+                  <c:v>67745</c:v>
                 </c:pt>
                 <c:pt idx="11">
-                  <c:v>59535</c:v>
+                  <c:v>65650</c:v>
                 </c:pt>
                 <c:pt idx="12">
-                  <c:v>71260</c:v>
+                  <c:v>78550</c:v>
                 </c:pt>
                 <c:pt idx="13">
-                  <c:v>83940</c:v>
+                  <c:v>92575</c:v>
                 </c:pt>
                 <c:pt idx="14">
-                  <c:v>69420</c:v>
+                  <c:v>76600</c:v>
                 </c:pt>
                 <c:pt idx="15">
-                  <c:v>92370</c:v>
+                  <c:v>102350</c:v>
                 </c:pt>
                 <c:pt idx="16">
-                  <c:v>100055</c:v>
+                  <c:v>110835</c:v>
                 </c:pt>
                 <c:pt idx="17">
-                  <c:v>109865</c:v>
+                  <c:v>121215</c:v>
                 </c:pt>
                 <c:pt idx="18">
-                  <c:v>80590</c:v>
+                  <c:v>88665</c:v>
                 </c:pt>
                 <c:pt idx="19">
-                  <c:v>77090</c:v>
+                  <c:v>84920</c:v>
                 </c:pt>
                 <c:pt idx="20">
-                  <c:v>115550</c:v>
+                  <c:v>127580</c:v>
                 </c:pt>
                 <c:pt idx="21">
-                  <c:v>120755</c:v>
+                  <c:v>133455</c:v>
                 </c:pt>
                 <c:pt idx="22">
-                  <c:v>114640</c:v>
+                  <c:v>126500</c:v>
                 </c:pt>
                 <c:pt idx="23">
-                  <c:v>131850</c:v>
+                  <c:v>145330</c:v>
                 </c:pt>
               </c:numCache>
             </c:numRef>
@@ -364,7 +364,7 @@
         <c:axId val="-2100718248"/>
         <c:scaling>
           <c:orientation val="minMax"/>
-          <c:max val="150000.0"/>
+          <c:max val="200000.0"/>
           <c:min val="0.0"/>
         </c:scaling>
         <c:delete val="0"/>
@@ -558,76 +558,76 @@
                 <c:formatCode>$#,##0;[Red]($#,##0);"-"</c:formatCode>
                 <c:ptCount val="24"/>
                 <c:pt idx="0">
-                  <c:v>70720</c:v>
+                  <c:v>77350</c:v>
                 </c:pt>
                 <c:pt idx="1">
-                  <c:v>88540</c:v>
+                  <c:v>96790</c:v>
                 </c:pt>
                 <c:pt idx="2">
-                  <c:v>94695</c:v>
+                  <c:v>103515</c:v>
                 </c:pt>
                 <c:pt idx="3">
-                  <c:v>66850</c:v>
+                  <c:v>73060</c:v>
                 </c:pt>
                 <c:pt idx="4">
-                  <c:v>84410</c:v>
+                  <c:v>92075</c:v>
                 </c:pt>
                 <c:pt idx="5">
-                  <c:v>48975</c:v>
+                  <c:v>53340</c:v>
                 </c:pt>
                 <c:pt idx="6">
-                  <c:v>37570</c:v>
+                  <c:v>40885</c:v>
                 </c:pt>
                 <c:pt idx="7">
-                  <c:v>59755</c:v>
+                  <c:v>65570</c:v>
                 </c:pt>
                 <c:pt idx="8">
-                  <c:v>64520</c:v>
+                  <c:v>70760</c:v>
                 </c:pt>
                 <c:pt idx="9">
-                  <c:v>64820</c:v>
+                  <c:v>71205</c:v>
                 </c:pt>
                 <c:pt idx="10">
-                  <c:v>38775</c:v>
+                  <c:v>42845</c:v>
                 </c:pt>
                 <c:pt idx="11">
-                  <c:v>38035</c:v>
+                  <c:v>42050</c:v>
                 </c:pt>
                 <c:pt idx="12">
-                  <c:v>45860</c:v>
+                  <c:v>50650</c:v>
                 </c:pt>
                 <c:pt idx="13">
-                  <c:v>46840</c:v>
+                  <c:v>51775</c:v>
                 </c:pt>
                 <c:pt idx="14">
-                  <c:v>29520</c:v>
+                  <c:v>32800</c:v>
                 </c:pt>
                 <c:pt idx="15">
-                  <c:v>60170</c:v>
+                  <c:v>66950</c:v>
                 </c:pt>
                 <c:pt idx="16">
-                  <c:v>62955</c:v>
+                  <c:v>70035</c:v>
                 </c:pt>
                 <c:pt idx="17">
-                  <c:v>75165</c:v>
+                  <c:v>83115</c:v>
                 </c:pt>
                 <c:pt idx="18">
-                  <c:v>47090</c:v>
+                  <c:v>51865</c:v>
                 </c:pt>
                 <c:pt idx="19">
-                  <c:v>43590</c:v>
+                  <c:v>48120</c:v>
                 </c:pt>
                 <c:pt idx="20">
-                  <c:v>76650</c:v>
+                  <c:v>84880</c:v>
                 </c:pt>
                 <c:pt idx="21">
-                  <c:v>79455</c:v>
+                  <c:v>88055</c:v>
                 </c:pt>
                 <c:pt idx="22">
-                  <c:v>75740</c:v>
+                  <c:v>83800</c:v>
                 </c:pt>
                 <c:pt idx="23">
-                  <c:v>85950</c:v>
+                  <c:v>94830</c:v>
                 </c:pt>
               </c:numCache>
             </c:numRef>
@@ -676,7 +676,7 @@
         <c:axId val="-2100718248"/>
         <c:scaling>
           <c:orientation val="minMax"/>
-          <c:max val="100000.0"/>
+          <c:max val="125000.0"/>
           <c:min val="0.0"/>
         </c:scaling>
         <c:delete val="0"/>
@@ -711,7 +711,7 @@
         <c:crossAx val="-2101159928"/>
         <c:crosses val="autoZero"/>
         <c:crossBetween val="midCat"/>
-        <c:majorUnit val="20000.0"/>
+        <c:majorUnit val="25000.0"/>
       </c:valAx>
     </c:plotArea>
     <c:plotVisOnly val="1"/>
@@ -870,76 +870,76 @@
                 <c:formatCode>$#,##0;[Red]($#,##0);"-"</c:formatCode>
                 <c:ptCount val="24"/>
                 <c:pt idx="0">
-                  <c:v>15000</c:v>
+                  <c:v>16500</c:v>
                 </c:pt>
                 <c:pt idx="1">
-                  <c:v>15000</c:v>
+                  <c:v>16500</c:v>
                 </c:pt>
                 <c:pt idx="2">
-                  <c:v>15000</c:v>
+                  <c:v>16500</c:v>
                 </c:pt>
                 <c:pt idx="3">
-                  <c:v>15000</c:v>
+                  <c:v>16500</c:v>
                 </c:pt>
                 <c:pt idx="4">
-                  <c:v>15000</c:v>
+                  <c:v>16500</c:v>
                 </c:pt>
                 <c:pt idx="5">
-                  <c:v>21800</c:v>
+                  <c:v>24000</c:v>
                 </c:pt>
                 <c:pt idx="6">
-                  <c:v>21800</c:v>
+                  <c:v>24000</c:v>
                 </c:pt>
                 <c:pt idx="7">
-                  <c:v>21800</c:v>
+                  <c:v>24000</c:v>
                 </c:pt>
                 <c:pt idx="8">
-                  <c:v>21800</c:v>
+                  <c:v>24000</c:v>
                 </c:pt>
                 <c:pt idx="9">
-                  <c:v>16300</c:v>
+                  <c:v>17900</c:v>
                 </c:pt>
                 <c:pt idx="10">
-                  <c:v>16300</c:v>
+                  <c:v>17900</c:v>
                 </c:pt>
                 <c:pt idx="11">
-                  <c:v>16300</c:v>
+                  <c:v>17900</c:v>
                 </c:pt>
                 <c:pt idx="12">
-                  <c:v>16300</c:v>
+                  <c:v>17900</c:v>
                 </c:pt>
                 <c:pt idx="13">
-                  <c:v>28300</c:v>
+                  <c:v>31100</c:v>
                 </c:pt>
                 <c:pt idx="14">
-                  <c:v>28300</c:v>
+                  <c:v>31100</c:v>
                 </c:pt>
                 <c:pt idx="15">
-                  <c:v>28300</c:v>
+                  <c:v>31100</c:v>
                 </c:pt>
                 <c:pt idx="16">
-                  <c:v>28300</c:v>
+                  <c:v>31100</c:v>
                 </c:pt>
                 <c:pt idx="17">
-                  <c:v>28300</c:v>
+                  <c:v>31100</c:v>
                 </c:pt>
                 <c:pt idx="18">
-                  <c:v>28300</c:v>
+                  <c:v>31100</c:v>
                 </c:pt>
                 <c:pt idx="19">
-                  <c:v>28300</c:v>
+                  <c:v>31100</c:v>
                 </c:pt>
                 <c:pt idx="20">
-                  <c:v>32500</c:v>
+                  <c:v>35700</c:v>
                 </c:pt>
                 <c:pt idx="21">
-                  <c:v>32500</c:v>
+                  <c:v>35700</c:v>
                 </c:pt>
                 <c:pt idx="22">
-                  <c:v>32500</c:v>
+                  <c:v>35700</c:v>
                 </c:pt>
                 <c:pt idx="23">
-                  <c:v>32500</c:v>
+                  <c:v>35700</c:v>
                 </c:pt>
               </c:numCache>
             </c:numRef>
@@ -1182,76 +1182,76 @@
                 <c:formatCode>$#,##0;[Red]($#,##0);"-"</c:formatCode>
                 <c:ptCount val="24"/>
                 <c:pt idx="0">
-                  <c:v>8800</c:v>
+                  <c:v>9700</c:v>
                 </c:pt>
                 <c:pt idx="1">
-                  <c:v>4600</c:v>
+                  <c:v>5100</c:v>
                 </c:pt>
                 <c:pt idx="2">
-                  <c:v>5200</c:v>
+                  <c:v>5700</c:v>
                 </c:pt>
                 <c:pt idx="3">
-                  <c:v>6400</c:v>
+                  <c:v>7000</c:v>
                 </c:pt>
                 <c:pt idx="4">
-                  <c:v>11600</c:v>
+                  <c:v>12700</c:v>
                 </c:pt>
                 <c:pt idx="5">
-                  <c:v>6400</c:v>
+                  <c:v>7000</c:v>
                 </c:pt>
                 <c:pt idx="6">
-                  <c:v>4600</c:v>
+                  <c:v>5100</c:v>
                 </c:pt>
                 <c:pt idx="7">
-                  <c:v>14000</c:v>
+                  <c:v>15400</c:v>
                 </c:pt>
                 <c:pt idx="8">
-                  <c:v>3900</c:v>
+                  <c:v>4300</c:v>
                 </c:pt>
                 <c:pt idx="9">
-                  <c:v>5200</c:v>
+                  <c:v>5700</c:v>
                 </c:pt>
                 <c:pt idx="10">
-                  <c:v>6400</c:v>
+                  <c:v>7000</c:v>
                 </c:pt>
                 <c:pt idx="11">
-                  <c:v>5200</c:v>
+                  <c:v>5700</c:v>
                 </c:pt>
                 <c:pt idx="12">
-                  <c:v>9100</c:v>
+                  <c:v>10000</c:v>
                 </c:pt>
                 <c:pt idx="13">
-                  <c:v>8800</c:v>
+                  <c:v>9700</c:v>
                 </c:pt>
                 <c:pt idx="14">
-                  <c:v>11600</c:v>
+                  <c:v>12700</c:v>
                 </c:pt>
                 <c:pt idx="15">
-                  <c:v>3900</c:v>
+                  <c:v>4300</c:v>
                 </c:pt>
                 <c:pt idx="16">
-                  <c:v>8800</c:v>
+                  <c:v>9700</c:v>
                 </c:pt>
                 <c:pt idx="17">
-                  <c:v>6400</c:v>
+                  <c:v>7000</c:v>
                 </c:pt>
                 <c:pt idx="18">
-                  <c:v>5200</c:v>
+                  <c:v>5700</c:v>
                 </c:pt>
                 <c:pt idx="19">
-                  <c:v>5200</c:v>
+                  <c:v>5700</c:v>
                 </c:pt>
                 <c:pt idx="20">
-                  <c:v>6400</c:v>
+                  <c:v>7000</c:v>
                 </c:pt>
                 <c:pt idx="21">
-                  <c:v>8800</c:v>
+                  <c:v>9700</c:v>
                 </c:pt>
                 <c:pt idx="22">
-                  <c:v>6400</c:v>
+                  <c:v>7000</c:v>
                 </c:pt>
                 <c:pt idx="23">
-                  <c:v>13400</c:v>
+                  <c:v>14800</c:v>
                 </c:pt>
               </c:numCache>
             </c:numRef>
@@ -1300,7 +1300,7 @@
         <c:axId val="-2100718248"/>
         <c:scaling>
           <c:orientation val="minMax"/>
-          <c:max val="15000.0"/>
+          <c:max val="20000.0"/>
           <c:min val="0.0"/>
         </c:scaling>
         <c:delete val="0"/>
@@ -1825,7 +1825,7 @@
           <a:lstStyle/>
           <a:p>
             <a:r>
-              <a:t>Services · All. September against September last year: 121.5%; Year to date against the same period last year: 77.1%; Gross margin, year to date: 57.0%. Revenue is 77.1% up on the same period last year, year to date ($367,245 against $207,330). Retainers make the highest gross margin (59.8%); Projects the lowest (55.8%). The business needs 40.0% gross margin just to cover overheads. Projects: 55.8% gross margin, 15.8 points over the 40.0% target ($38,127 ahead on $241,145 this financial year to date). Retainers: 59.8% gross margin, 19.8 points over the 40.0% target ($19,320 ahead on $97,500 this financial year to date).</a:t>
+              <a:t>Services · All. September against September last year: 121.4%; Year to date against the same period last year: 77.6%; Gross margin, year to date: 61.1%. Revenue is 77.6% up on the same period last year, year to date ($405,285 against $228,200). Retainers make the highest gross margin (63.4%); Projects the lowest (60.0%). The business needs 45.8% gross margin just to cover overheads. Projects: 60.0% gross margin, 20.0 points over the 40.0% target ($53,451 ahead on $266,685 this financial year to date). Retainers: 63.4% gross margin, 23.4 points over the 40.0% target ($25,080 ahead on $107,100 this financial year to date).</a:t>
             </a:r>
           </a:p>
         </p:txBody>
@@ -1895,7 +1895,7 @@
           <a:lstStyle/>
           <a:p>
             <a:r>
-              <a:t>Services · Projects. September against September last year: 126.0%; Year to date against the same period last year: 70.3%; Gross margin, year to date: 55.8%. Projects brought in $241,145 this financial year to date, 70.3% on the same period last year (slower than the business as a whole, 77.1%), at a 55.8% gross margin (below the 57.0% overall). Projects: 55.8% gross margin, 15.8 points over the 40.0% target ($38,127 ahead on $241,145 this financial year to date).</a:t>
+              <a:t>Services · Projects. September against September last year: 125.5%; Year to date against the same period last year: 70.8%; Gross margin, year to date: 60.0%. Projects brought in $266,685 this financial year to date, 70.8% on the same period last year (slower than the business as a whole, 77.6%), at a 60.0% gross margin (below the 61.1% overall). Projects: 60.0% gross margin, 20.0 points over the 40.0% target ($53,451 ahead on $266,685 this financial year to date).</a:t>
             </a:r>
           </a:p>
         </p:txBody>
@@ -1965,7 +1965,7 @@
           <a:lstStyle/>
           <a:p>
             <a:r>
-              <a:t>Services · Retainers. September against September last year: 99.4%; Year to date against the same period last year: 99.4%; Gross margin, year to date: 59.8%. Retainers brought in $97,500 this financial year to date, 99.4% on the same period last year (faster than the business as a whole, 77.1%), at a 59.8% gross margin (above the 57.0% overall). Retainers: 59.8% gross margin, 19.8 points over the 40.0% target ($19,320 ahead on $97,500 this financial year to date).</a:t>
+              <a:t>Services · Retainers. September against September last year: 99.4%; Year to date against the same period last year: 99.4%; Gross margin, year to date: 63.4%. Retainers brought in $107,100 this financial year to date, 99.4% on the same period last year (faster than the business as a whole, 77.6%), at a 63.4% gross margin (above the 61.1% overall). Retainers: 63.4% gross margin, 23.4 points over the 40.0% target ($25,080 ahead on $107,100 this financial year to date).</a:t>
             </a:r>
           </a:p>
         </p:txBody>
@@ -2035,7 +2035,7 @@
           <a:lstStyle/>
           <a:p>
             <a:r>
-              <a:t>Services · Training. September against September last year: 157.7%; Year to date against the same period last year: 70.2%; Gross margin, year to date: 58.0%. Training brought in $28,600 this financial year to date, 70.2% on the same period last year (slower than the business as a whole, 77.1%), at a 58.0% gross margin (above the 57.0% overall). Training: 58.0% gross margin, 18.0 points over the 40.0% target ($5,160 ahead on $28,600 this financial year to date).</a:t>
+              <a:t>Services · Training. September against September last year: 159.6%; Year to date against the same period last year: 71.2%; Gross margin, year to date: 61.9%. Training brought in $31,500 this financial year to date, 71.2% on the same period last year (slower than the business as a whole, 77.6%), at a 61.9% gross margin (above the 61.1% overall). Training: 61.9% gross margin, 21.9 points over the 40.0% target ($6,900 ahead on $31,500 this financial year to date).</a:t>
             </a:r>
           </a:p>
         </p:txBody>
@@ -2105,7 +2105,7 @@
           <a:lstStyle/>
           <a:p>
             <a:r>
-              <a:t>By type of work: financial year to date (Jul to Sep 2026) against the same period last year · Services. From gross margin to profit: September's client work made $68,410 gross margin (51.9%). Consultant time not charged to client work took $660 and overheads $52,140, leaving $15,610 profit before tax (11.8% of revenue). To cover overheads, client work needs a 40.0% gross margin on average.</a:t>
+              <a:t>By type of work: financial year to date (Jul to Sep 2026) against the same period last year · Services. From gross margin to profit: September's client work made $81,890 gross margin (56.3%). Consultant time not charged to client work took $14,352 and overheads $52,140, leaving $15,398 profit before tax (10.6% of revenue). To cover overheads, client work needs a 45.8% gross margin on average.</a:t>
             </a:r>
           </a:p>
         </p:txBody>
@@ -5520,7 +5520,7 @@
                 </a:solidFill>
                 <a:latin typeface="Roboto"/>
               </a:rPr>
-              <a:t>Data retrieved 2pm, Tue 6 Oct 2026 · Generated 8 Oct 2026, 9:35am · Sample data · Made with Python (python-pptx)</a:t>
+              <a:t>Data retrieved 2pm, Tue 6 Oct 2026 · Generated 9 Oct 2026, 8:41am · Sample data · Made with Python (python-pptx)</a:t>
             </a:r>
           </a:p>
         </p:txBody>
@@ -5866,7 +5866,7 @@
                 </a:solidFill>
                 <a:latin typeface="Roboto"/>
               </a:rPr>
-              <a:t>121.5%</a:t>
+              <a:t>121.4%</a:t>
             </a:r>
           </a:p>
         </p:txBody>
@@ -5905,7 +5905,7 @@
                 </a:solidFill>
                 <a:latin typeface="Roboto"/>
               </a:rPr>
-              <a:t>$131,850 against $59,535</a:t>
+              <a:t>$145,330 against $65,650</a:t>
             </a:r>
           </a:p>
         </p:txBody>
@@ -6032,7 +6032,7 @@
                 </a:solidFill>
                 <a:latin typeface="Roboto"/>
               </a:rPr>
-              <a:t>77.1%</a:t>
+              <a:t>77.6%</a:t>
             </a:r>
           </a:p>
         </p:txBody>
@@ -6071,7 +6071,7 @@
                 </a:solidFill>
                 <a:latin typeface="Roboto"/>
               </a:rPr>
-              <a:t>$367,245 against $207,330</a:t>
+              <a:t>$405,285 against $228,200</a:t>
             </a:r>
           </a:p>
         </p:txBody>
@@ -6198,7 +6198,7 @@
                 </a:solidFill>
                 <a:latin typeface="Roboto"/>
               </a:rPr>
-              <a:t>57.0%</a:t>
+              <a:t>61.1%</a:t>
             </a:r>
           </a:p>
         </p:txBody>
@@ -6237,7 +6237,7 @@
                 </a:solidFill>
                 <a:latin typeface="Roboto"/>
               </a:rPr>
-              <a:t>$209,505 before overheads</a:t>
+              <a:t>$247,545 before overheads</a:t>
             </a:r>
           </a:p>
         </p:txBody>
@@ -6382,7 +6382,7 @@
                 </a:solidFill>
                 <a:latin typeface="Roboto"/>
               </a:rPr>
-              <a:t>Revenue is 77.1% up on the same period last year, year to date ($367,245 against $207,330). Retainers make the highest gross margin (59.8%); Projects the lowest (55.8%). The business needs 40.0% gross margin just to cover overheads.</a:t>
+              <a:t>Revenue is 77.6% up on the same period last year, year to date ($405,285 against $228,200). Retainers make the highest gross margin (63.4%); Projects the lowest (60.0%). The business needs 45.8% gross margin just to cover overheads.</a:t>
             </a:r>
           </a:p>
         </p:txBody>
@@ -6509,7 +6509,7 @@
                 </a:solidFill>
                 <a:latin typeface="Roboto"/>
               </a:rPr>
-              <a:t>Projects: 55.8% gross margin, 15.8 points over the 40.0% target ($38,127 ahead on $241,145 this financial year to date). Retainers: 59.8% gross margin, 19.8 points over the 40.0% target ($19,320 ahead on $97,500 this financial year to date).</a:t>
+              <a:t>Projects: 60.0% gross margin, 20.0 points over the 40.0% target ($53,451 ahead on $266,685 this financial year to date). Retainers: 63.4% gross margin, 23.4 points over the 40.0% target ($25,080 ahead on $107,100 this financial year to date).</a:t>
             </a:r>
           </a:p>
         </p:txBody>
@@ -6587,7 +6587,7 @@
                 </a:solidFill>
                 <a:latin typeface="Roboto"/>
               </a:rPr>
-              <a:t>Data retrieved 2pm, Tue 6 Oct 2026 · Generated 8 Oct 2026, 9:35am · Sample data · Made with Python (python-pptx)</a:t>
+              <a:t>Data retrieved 2pm, Tue 6 Oct 2026 · Generated 9 Oct 2026, 8:41am · Sample data · Made with Python (python-pptx)</a:t>
             </a:r>
           </a:p>
         </p:txBody>
@@ -6933,7 +6933,7 @@
                 </a:solidFill>
                 <a:latin typeface="Roboto"/>
               </a:rPr>
-              <a:t>126.0%</a:t>
+              <a:t>125.5%</a:t>
             </a:r>
           </a:p>
         </p:txBody>
@@ -6972,7 +6972,7 @@
                 </a:solidFill>
                 <a:latin typeface="Roboto"/>
               </a:rPr>
-              <a:t>$85,950 against $38,035</a:t>
+              <a:t>$94,830 against $42,050</a:t>
             </a:r>
           </a:p>
         </p:txBody>
@@ -7099,7 +7099,7 @@
                 </a:solidFill>
                 <a:latin typeface="Roboto"/>
               </a:rPr>
-              <a:t>70.3%</a:t>
+              <a:t>70.8%</a:t>
             </a:r>
           </a:p>
         </p:txBody>
@@ -7138,7 +7138,7 @@
                 </a:solidFill>
                 <a:latin typeface="Roboto"/>
               </a:rPr>
-              <a:t>$241,145 against $141,630</a:t>
+              <a:t>$266,685 against $156,100</a:t>
             </a:r>
           </a:p>
         </p:txBody>
@@ -7265,7 +7265,7 @@
                 </a:solidFill>
                 <a:latin typeface="Roboto"/>
               </a:rPr>
-              <a:t>55.8%</a:t>
+              <a:t>60.0%</a:t>
             </a:r>
           </a:p>
         </p:txBody>
@@ -7304,7 +7304,7 @@
                 </a:solidFill>
                 <a:latin typeface="Roboto"/>
               </a:rPr>
-              <a:t>$134,585 before overheads</a:t>
+              <a:t>$160,125 before overheads</a:t>
             </a:r>
           </a:p>
         </p:txBody>
@@ -7449,7 +7449,7 @@
                 </a:solidFill>
                 <a:latin typeface="Roboto"/>
               </a:rPr>
-              <a:t>Projects brought in $241,145 this financial year to date, 70.3% on the same period last year (slower than the business as a whole, 77.1%), at a 55.8% gross margin (below the 57.0% overall).</a:t>
+              <a:t>Projects brought in $266,685 this financial year to date, 70.8% on the same period last year (slower than the business as a whole, 77.6%), at a 60.0% gross margin (below the 61.1% overall).</a:t>
             </a:r>
           </a:p>
         </p:txBody>
@@ -7576,7 +7576,7 @@
                 </a:solidFill>
                 <a:latin typeface="Roboto"/>
               </a:rPr>
-              <a:t>Projects: 55.8% gross margin, 15.8 points over the 40.0% target ($38,127 ahead on $241,145 this financial year to date).</a:t>
+              <a:t>Projects: 60.0% gross margin, 20.0 points over the 40.0% target ($53,451 ahead on $266,685 this financial year to date).</a:t>
             </a:r>
           </a:p>
         </p:txBody>
@@ -7654,7 +7654,7 @@
                 </a:solidFill>
                 <a:latin typeface="Roboto"/>
               </a:rPr>
-              <a:t>Data retrieved 2pm, Tue 6 Oct 2026 · Generated 8 Oct 2026, 9:35am · Sample data · Made with Python (python-pptx)</a:t>
+              <a:t>Data retrieved 2pm, Tue 6 Oct 2026 · Generated 9 Oct 2026, 8:41am · Sample data · Made with Python (python-pptx)</a:t>
             </a:r>
           </a:p>
         </p:txBody>
@@ -8039,7 +8039,7 @@
                 </a:solidFill>
                 <a:latin typeface="Roboto"/>
               </a:rPr>
-              <a:t>$32,500 against $16,300</a:t>
+              <a:t>$35,700 against $17,900</a:t>
             </a:r>
           </a:p>
         </p:txBody>
@@ -8205,7 +8205,7 @@
                 </a:solidFill>
                 <a:latin typeface="Roboto"/>
               </a:rPr>
-              <a:t>$97,500 against $48,900</a:t>
+              <a:t>$107,100 against $53,700</a:t>
             </a:r>
           </a:p>
         </p:txBody>
@@ -8332,7 +8332,7 @@
                 </a:solidFill>
                 <a:latin typeface="Roboto"/>
               </a:rPr>
-              <a:t>59.8%</a:t>
+              <a:t>63.4%</a:t>
             </a:r>
           </a:p>
         </p:txBody>
@@ -8371,7 +8371,7 @@
                 </a:solidFill>
                 <a:latin typeface="Roboto"/>
               </a:rPr>
-              <a:t>$58,320 before overheads</a:t>
+              <a:t>$67,920 before overheads</a:t>
             </a:r>
           </a:p>
         </p:txBody>
@@ -8516,7 +8516,7 @@
                 </a:solidFill>
                 <a:latin typeface="Roboto"/>
               </a:rPr>
-              <a:t>Retainers brought in $97,500 this financial year to date, 99.4% on the same period last year (faster than the business as a whole, 77.1%), at a 59.8% gross margin (above the 57.0% overall).</a:t>
+              <a:t>Retainers brought in $107,100 this financial year to date, 99.4% on the same period last year (faster than the business as a whole, 77.6%), at a 63.4% gross margin (above the 61.1% overall).</a:t>
             </a:r>
           </a:p>
         </p:txBody>
@@ -8643,7 +8643,7 @@
                 </a:solidFill>
                 <a:latin typeface="Roboto"/>
               </a:rPr>
-              <a:t>Retainers: 59.8% gross margin, 19.8 points over the 40.0% target ($19,320 ahead on $97,500 this financial year to date).</a:t>
+              <a:t>Retainers: 63.4% gross margin, 23.4 points over the 40.0% target ($25,080 ahead on $107,100 this financial year to date).</a:t>
             </a:r>
           </a:p>
         </p:txBody>
@@ -8721,7 +8721,7 @@
                 </a:solidFill>
                 <a:latin typeface="Roboto"/>
               </a:rPr>
-              <a:t>Data retrieved 2pm, Tue 6 Oct 2026 · Generated 8 Oct 2026, 9:35am · Sample data · Made with Python (python-pptx)</a:t>
+              <a:t>Data retrieved 2pm, Tue 6 Oct 2026 · Generated 9 Oct 2026, 8:41am · Sample data · Made with Python (python-pptx)</a:t>
             </a:r>
           </a:p>
         </p:txBody>
@@ -9067,7 +9067,7 @@
                 </a:solidFill>
                 <a:latin typeface="Roboto"/>
               </a:rPr>
-              <a:t>157.7%</a:t>
+              <a:t>159.6%</a:t>
             </a:r>
           </a:p>
         </p:txBody>
@@ -9106,7 +9106,7 @@
                 </a:solidFill>
                 <a:latin typeface="Roboto"/>
               </a:rPr>
-              <a:t>$13,400 against $5,200</a:t>
+              <a:t>$14,800 against $5,700</a:t>
             </a:r>
           </a:p>
         </p:txBody>
@@ -9233,7 +9233,7 @@
                 </a:solidFill>
                 <a:latin typeface="Roboto"/>
               </a:rPr>
-              <a:t>70.2%</a:t>
+              <a:t>71.2%</a:t>
             </a:r>
           </a:p>
         </p:txBody>
@@ -9272,7 +9272,7 @@
                 </a:solidFill>
                 <a:latin typeface="Roboto"/>
               </a:rPr>
-              <a:t>$28,600 against $16,800</a:t>
+              <a:t>$31,500 against $18,400</a:t>
             </a:r>
           </a:p>
         </p:txBody>
@@ -9399,7 +9399,7 @@
                 </a:solidFill>
                 <a:latin typeface="Roboto"/>
               </a:rPr>
-              <a:t>58.0%</a:t>
+              <a:t>61.9%</a:t>
             </a:r>
           </a:p>
         </p:txBody>
@@ -9438,7 +9438,7 @@
                 </a:solidFill>
                 <a:latin typeface="Roboto"/>
               </a:rPr>
-              <a:t>$16,600 before overheads</a:t>
+              <a:t>$19,500 before overheads</a:t>
             </a:r>
           </a:p>
         </p:txBody>
@@ -9583,7 +9583,7 @@
                 </a:solidFill>
                 <a:latin typeface="Roboto"/>
               </a:rPr>
-              <a:t>Training brought in $28,600 this financial year to date, 70.2% on the same period last year (slower than the business as a whole, 77.1%), at a 58.0% gross margin (above the 57.0% overall).</a:t>
+              <a:t>Training brought in $31,500 this financial year to date, 71.2% on the same period last year (slower than the business as a whole, 77.6%), at a 61.9% gross margin (above the 61.1% overall).</a:t>
             </a:r>
           </a:p>
         </p:txBody>
@@ -9710,7 +9710,7 @@
                 </a:solidFill>
                 <a:latin typeface="Roboto"/>
               </a:rPr>
-              <a:t>Training: 58.0% gross margin, 18.0 points over the 40.0% target ($5,160 ahead on $28,600 this financial year to date).</a:t>
+              <a:t>Training: 61.9% gross margin, 21.9 points over the 40.0% target ($6,900 ahead on $31,500 this financial year to date).</a:t>
             </a:r>
           </a:p>
         </p:txBody>
@@ -9788,7 +9788,7 @@
                 </a:solidFill>
                 <a:latin typeface="Roboto"/>
               </a:rPr>
-              <a:t>Data retrieved 2pm, Tue 6 Oct 2026 · Generated 8 Oct 2026, 9:35am · Sample data · Made with Python (python-pptx)</a:t>
+              <a:t>Data retrieved 2pm, Tue 6 Oct 2026 · Generated 9 Oct 2026, 8:41am · Sample data · Made with Python (python-pptx)</a:t>
             </a:r>
           </a:p>
         </p:txBody>
@@ -10007,7 +10007,7 @@
                 </a:solidFill>
                 <a:latin typeface="Roboto"/>
               </a:rPr>
-              <a:t>From gross margin to profit: September's client work made $68,410 gross margin (51.9%). Consultant time not charged to client work took $660 and overheads $52,140, leaving $15,610 profit before tax (11.8% of revenue). To cover overheads, client work needs a 40.0% gross margin on average.</a:t>
+              <a:t>From gross margin to profit: September's client work made $81,890 gross margin (56.3%). Consultant time not charged to client work took $14,352 and overheads $52,140, leaving $15,398 profit before tax (10.6% of revenue). To cover overheads, client work needs a 45.8% gross margin on average.</a:t>
             </a:r>
           </a:p>
         </p:txBody>
@@ -10238,7 +10238,7 @@
                           </a:solidFill>
                           <a:latin typeface="Roboto"/>
                         </a:rPr>
-                        <a:t>$241,145</a:t>
+                        <a:t>$266,685</a:t>
                       </a:r>
                     </a:p>
                   </a:txBody>
@@ -10265,7 +10265,7 @@
                           </a:solidFill>
                           <a:latin typeface="Roboto"/>
                         </a:rPr>
-                        <a:t>$141,630</a:t>
+                        <a:t>$156,100</a:t>
                       </a:r>
                     </a:p>
                   </a:txBody>
@@ -10292,7 +10292,7 @@
                           </a:solidFill>
                           <a:latin typeface="Roboto"/>
                         </a:rPr>
-                        <a:t>70.3%</a:t>
+                        <a:t>70.8%</a:t>
                       </a:r>
                     </a:p>
                   </a:txBody>
@@ -10319,7 +10319,7 @@
                           </a:solidFill>
                           <a:latin typeface="Roboto"/>
                         </a:rPr>
-                        <a:t>$134,585</a:t>
+                        <a:t>$160,125</a:t>
                       </a:r>
                     </a:p>
                   </a:txBody>
@@ -10346,7 +10346,7 @@
                           </a:solidFill>
                           <a:latin typeface="Roboto"/>
                         </a:rPr>
-                        <a:t>55.8%</a:t>
+                        <a:t>60.0%</a:t>
                       </a:r>
                     </a:p>
                   </a:txBody>
@@ -10402,7 +10402,7 @@
                           </a:solidFill>
                           <a:latin typeface="Roboto"/>
                         </a:rPr>
-                        <a:t>$97,500</a:t>
+                        <a:t>$107,100</a:t>
                       </a:r>
                     </a:p>
                   </a:txBody>
@@ -10429,7 +10429,7 @@
                           </a:solidFill>
                           <a:latin typeface="Roboto"/>
                         </a:rPr>
-                        <a:t>$48,900</a:t>
+                        <a:t>$53,700</a:t>
                       </a:r>
                     </a:p>
                   </a:txBody>
@@ -10483,7 +10483,7 @@
                           </a:solidFill>
                           <a:latin typeface="Roboto"/>
                         </a:rPr>
-                        <a:t>$58,320</a:t>
+                        <a:t>$67,920</a:t>
                       </a:r>
                     </a:p>
                   </a:txBody>
@@ -10510,7 +10510,7 @@
                           </a:solidFill>
                           <a:latin typeface="Roboto"/>
                         </a:rPr>
-                        <a:t>59.8%</a:t>
+                        <a:t>63.4%</a:t>
                       </a:r>
                     </a:p>
                   </a:txBody>
@@ -10566,7 +10566,7 @@
                           </a:solidFill>
                           <a:latin typeface="Roboto"/>
                         </a:rPr>
-                        <a:t>$28,600</a:t>
+                        <a:t>$31,500</a:t>
                       </a:r>
                     </a:p>
                   </a:txBody>
@@ -10593,7 +10593,7 @@
                           </a:solidFill>
                           <a:latin typeface="Roboto"/>
                         </a:rPr>
-                        <a:t>$16,800</a:t>
+                        <a:t>$18,400</a:t>
                       </a:r>
                     </a:p>
                   </a:txBody>
@@ -10620,7 +10620,7 @@
                           </a:solidFill>
                           <a:latin typeface="Roboto"/>
                         </a:rPr>
-                        <a:t>70.2%</a:t>
+                        <a:t>71.2%</a:t>
                       </a:r>
                     </a:p>
                   </a:txBody>
@@ -10647,7 +10647,7 @@
                           </a:solidFill>
                           <a:latin typeface="Roboto"/>
                         </a:rPr>
-                        <a:t>$16,600</a:t>
+                        <a:t>$19,500</a:t>
                       </a:r>
                     </a:p>
                   </a:txBody>
@@ -10674,7 +10674,7 @@
                           </a:solidFill>
                           <a:latin typeface="Roboto"/>
                         </a:rPr>
-                        <a:t>58.0%</a:t>
+                        <a:t>61.9%</a:t>
                       </a:r>
                     </a:p>
                   </a:txBody>
@@ -10730,7 +10730,7 @@
                           </a:solidFill>
                           <a:latin typeface="Roboto"/>
                         </a:rPr>
-                        <a:t>$367,245</a:t>
+                        <a:t>$405,285</a:t>
                       </a:r>
                     </a:p>
                   </a:txBody>
@@ -10757,7 +10757,7 @@
                           </a:solidFill>
                           <a:latin typeface="Roboto"/>
                         </a:rPr>
-                        <a:t>$207,330</a:t>
+                        <a:t>$228,200</a:t>
                       </a:r>
                     </a:p>
                   </a:txBody>
@@ -10784,7 +10784,7 @@
                           </a:solidFill>
                           <a:latin typeface="Roboto"/>
                         </a:rPr>
-                        <a:t>77.1%</a:t>
+                        <a:t>77.6%</a:t>
                       </a:r>
                     </a:p>
                   </a:txBody>
@@ -10811,7 +10811,7 @@
                           </a:solidFill>
                           <a:latin typeface="Roboto"/>
                         </a:rPr>
-                        <a:t>$209,505</a:t>
+                        <a:t>$247,545</a:t>
                       </a:r>
                     </a:p>
                   </a:txBody>
@@ -10838,7 +10838,7 @@
                           </a:solidFill>
                           <a:latin typeface="Roboto"/>
                         </a:rPr>
-                        <a:t>57.0%</a:t>
+                        <a:t>61.1%</a:t>
                       </a:r>
                     </a:p>
                   </a:txBody>
@@ -10926,7 +10926,7 @@
                 </a:solidFill>
                 <a:latin typeface="Roboto"/>
               </a:rPr>
-              <a:t>Data retrieved 2pm, Tue 6 Oct 2026 · Generated 8 Oct 2026, 9:35am · Sample data · Made with Python (python-pptx)</a:t>
+              <a:t>Data retrieved 2pm, Tue 6 Oct 2026 · Generated 9 Oct 2026, 8:41am · Sample data · Made with Python (python-pptx)</a:t>
             </a:r>
           </a:p>
         </p:txBody>
